--- a/Topic_D/Exam_Practice/TD-L12_Writing_Workshop_Topic_D_Review_and_Four_Skills_Assessment.pptx
+++ b/Topic_D/Exam_Practice/TD-L12_Writing_Workshop_Topic_D_Review_and_Four_Skills_Assessment.pptx
@@ -784,7 +784,11 @@
           <a:lstStyle/>
           <a:p>
             <a:r>
-              <a:rPr lang="en-US" dirty="0"/>
+              <a:rPr lang="ar-SA" dirty="0">
+                <a:latin typeface="Amiri" pitchFamily="2" charset="-78"/>
+                <a:ea typeface="Amiri" pitchFamily="2" charset="-78"/>
+                <a:cs typeface="Amiri" pitchFamily="2" charset="-78"/>
+              </a:rPr>
               <a:t>Q3 (3 min to choose and read). Title (أ) suits Core and Develop; title (ب) suits Stretch.</a:t>
             </a:r>
             <a:endParaRPr lang="en-US" dirty="0"/>
@@ -1403,7 +1407,11 @@
           <a:lstStyle/>
           <a:p>
             <a:r>
-              <a:rPr lang="en-US" dirty="0"/>
+              <a:rPr lang="ar-SA" dirty="0">
+                <a:latin typeface="Amiri" pitchFamily="2" charset="-78"/>
+                <a:ea typeface="Amiri" pitchFamily="2" charset="-78"/>
+                <a:cs typeface="Amiri" pitchFamily="2" charset="-78"/>
+              </a:rPr>
               <a:t>WELCOME (1 min) — while students join.
 • Greet each student by name as they arrive: السَّلَامُ عَلَيْكُمْ. Take the register (Pastoral Tracker: attendance 0/1).
 • 2-MINUTE CHECK-IN (SEND training): a private chat to any student who seemed unsettled last lesson — “Are you okay today? 👍 / 👎”.
@@ -1936,7 +1944,11 @@
           <a:lstStyle/>
           <a:p>
             <a:r>
-              <a:rPr lang="en-US" dirty="0"/>
+              <a:rPr lang="ar-SA" dirty="0">
+                <a:latin typeface="Amiri" pitchFamily="2" charset="-78"/>
+                <a:ea typeface="Amiri" pitchFamily="2" charset="-78"/>
+                <a:cs typeface="Amiri" pitchFamily="2" charset="-78"/>
+              </a:rPr>
               <a:t>Question words: صِفِي (describe! — f. imperative) · تَدْرُسِينَهَا (you study them — PRESENT) · تَفْعَلِينَ (you do) · خِطَطُكِ (your plans — FUTURE) · اسْأَلِي (ask!).</a:t>
             </a:r>
             <a:endParaRPr lang="en-US" dirty="0"/>
@@ -2508,6 +2520,7 @@
                   <a:srgbClr val="D4AF37"/>
                 </a:solidFill>
                 <a:latin typeface="Amiri" pitchFamily="2" charset="-78"/>
+                <a:ea typeface="Amiri" pitchFamily="2" charset="-78"/>
                 <a:cs typeface="Amiri" pitchFamily="2" charset="-78"/>
               </a:rPr>
               <a:t>م</a:t>
@@ -2714,6 +2727,7 @@
                   <a:srgbClr val="D4AF37"/>
                 </a:solidFill>
                 <a:latin typeface="Amiri" pitchFamily="2" charset="-78"/>
+                <a:ea typeface="Amiri" pitchFamily="2" charset="-78"/>
                 <a:cs typeface="Amiri" pitchFamily="2" charset="-78"/>
               </a:rPr>
               <a:t>وَرْشَةُ الكِتَابَةِ — امْتِحَانٌ تَجْرِيبِيٌّ</a:t>
@@ -3171,6 +3185,7 @@
                   <a:srgbClr val="D4AF37"/>
                 </a:solidFill>
                 <a:latin typeface="Amiri" pitchFamily="2" charset="-78"/>
+                <a:ea typeface="Amiri" pitchFamily="2" charset="-78"/>
                 <a:cs typeface="Amiri" pitchFamily="2" charset="-78"/>
               </a:rPr>
               <a:t>م</a:t>
@@ -3491,6 +3506,7 @@
                   <a:srgbClr val="8A6D1E"/>
                 </a:solidFill>
                 <a:latin typeface="Amiri" pitchFamily="2" charset="-78"/>
+                <a:ea typeface="Amiri" pitchFamily="2" charset="-78"/>
                 <a:cs typeface="Amiri" pitchFamily="2" charset="-78"/>
               </a:rPr>
               <a:t>نَمُوذَجُ الإِجَابَةِ</a:t>
@@ -3604,6 +3620,7 @@
                   <a:srgbClr val="1F2A37"/>
                 </a:solidFill>
                 <a:latin typeface="Amiri" pitchFamily="2" charset="-78"/>
+                <a:ea typeface="Amiri" pitchFamily="2" charset="-78"/>
                 <a:cs typeface="Amiri" pitchFamily="2" charset="-78"/>
               </a:rPr>
               <a:t>مَرْحَبًا يَا لَيْلَى،</a:t>
@@ -3623,6 +3640,7 @@
                   <a:srgbClr val="1F2A37"/>
                 </a:solidFill>
                 <a:latin typeface="Amiri" pitchFamily="2" charset="-78"/>
+                <a:ea typeface="Amiri" pitchFamily="2" charset="-78"/>
                 <a:cs typeface="Amiri" pitchFamily="2" charset="-78"/>
               </a:rPr>
               <a:t>كَيْفَ حَالُكِ؟ أَنَا الآنَ طَالِبَةٌ فِي الكُلِّيَّةِ الجَدِيدَةِ! الكُلِّيَّةُ كَبِيرَةٌ وَحَدِيثَةٌ، وَفِيهَا مَكْتَبَةٌ جَمِيلَةٌ. أَدْرُسُ الأَحْيَاءَ وَالكِيمْيَاءَ وَعِلْمَ النَّفْسِ. تَبْدَأُ الحِصَصُ فِي التَّاسِعَةِ وَتَنْتَهِي فِي الرَّابِعَةِ. مَادَّتِي المُفَضَّلَةُ عِلْمُ النَّفْسِ، لِأَنَّ المُعَلِّمَةَ صَبُورَةٌ وَمُمْتِعَةٌ. بِالإِضَافَةِ إِلَى ذٰلِكَ، بَدَأْتُ عَمَلًا جُزْئِيًّا فِي صَيْدَلِيَّةٍ يَوْمَ السَّبْتِ. الدِّرَاسَةُ صَعْبَةٌ، وَمَعَ ذٰلِكَ أَنَا سَعِيدَةٌ. فِي المُسْتَقْبَلِ سَأَدْرُسُ الطِّبَّ إِنْ شَاءَ اللّٰهُ. وَأَنْتِ، كَيْفَ مَدْرَسَتُكِ؟</a:t>
@@ -3642,6 +3660,7 @@
                   <a:srgbClr val="1F2A37"/>
                 </a:solidFill>
                 <a:latin typeface="Amiri" pitchFamily="2" charset="-78"/>
+                <a:ea typeface="Amiri" pitchFamily="2" charset="-78"/>
                 <a:cs typeface="Amiri" pitchFamily="2" charset="-78"/>
               </a:rPr>
               <a:t>مَعَ السَّلَامَةِ،</a:t>
@@ -3661,6 +3680,7 @@
                   <a:srgbClr val="1F2A37"/>
                 </a:solidFill>
                 <a:latin typeface="Amiri" pitchFamily="2" charset="-78"/>
+                <a:ea typeface="Amiri" pitchFamily="2" charset="-78"/>
                 <a:cs typeface="Amiri" pitchFamily="2" charset="-78"/>
               </a:rPr>
               <a:t>مَرْيَمُ</a:t>
@@ -3824,11 +3844,12 @@
               <a:buNone/>
             </a:pPr>
             <a:r>
-              <a:rPr lang="en-US" sz="950" b="1" dirty="0">
+              <a:rPr lang="ar-SA" sz="950" b="1" dirty="0">
                 <a:solidFill>
                   <a:srgbClr val="FFFFFF"/>
                 </a:solidFill>
                 <a:latin typeface="Calibri" pitchFamily="34" charset="0"/>
+                <a:ea typeface="Amiri" pitchFamily="2" charset="-78"/>
                 <a:cs typeface="Amiri" pitchFamily="2" charset="-78"/>
               </a:rPr>
               <a:t>كَبِيرَةٌ وَحَدِيثَةٌ</a:t>
@@ -3889,11 +3910,12 @@
               <a:buNone/>
             </a:pPr>
             <a:r>
-              <a:rPr lang="en-US" sz="950" b="1" dirty="0">
+              <a:rPr lang="ar-SA" sz="950" b="1" dirty="0">
                 <a:solidFill>
                   <a:srgbClr val="FFFFFF"/>
                 </a:solidFill>
                 <a:latin typeface="Calibri" pitchFamily="34" charset="0"/>
+                <a:ea typeface="Amiri" pitchFamily="2" charset="-78"/>
                 <a:cs typeface="Amiri" pitchFamily="2" charset="-78"/>
               </a:rPr>
               <a:t>تَبْدَأُ الحِصَصُ فِي التَّاسِعَةِ</a:t>
@@ -3954,11 +3976,12 @@
               <a:buNone/>
             </a:pPr>
             <a:r>
-              <a:rPr lang="en-US" sz="950" b="1" dirty="0">
+              <a:rPr lang="ar-SA" sz="950" b="1" dirty="0">
                 <a:solidFill>
                   <a:srgbClr val="FFFFFF"/>
                 </a:solidFill>
                 <a:latin typeface="Calibri" pitchFamily="34" charset="0"/>
+                <a:ea typeface="Amiri" pitchFamily="2" charset="-78"/>
                 <a:cs typeface="Amiri" pitchFamily="2" charset="-78"/>
               </a:rPr>
               <a:t>بِالإِضَافَةِ إِلَى ذٰلِكَ</a:t>
@@ -4019,11 +4042,12 @@
               <a:buNone/>
             </a:pPr>
             <a:r>
-              <a:rPr lang="en-US" sz="950" b="1" dirty="0">
+              <a:rPr lang="ar-SA" sz="950" b="1" dirty="0">
                 <a:solidFill>
                   <a:srgbClr val="FFFFFF"/>
                 </a:solidFill>
                 <a:latin typeface="Calibri" pitchFamily="34" charset="0"/>
+                <a:ea typeface="Amiri" pitchFamily="2" charset="-78"/>
                 <a:cs typeface="Amiri" pitchFamily="2" charset="-78"/>
               </a:rPr>
               <a:t>سَأَدْرُسُ الطِّبَّ</a:t>
@@ -4157,6 +4181,7 @@
                   <a:srgbClr val="D4AF37"/>
                 </a:solidFill>
                 <a:latin typeface="Amiri" pitchFamily="2" charset="-78"/>
+                <a:ea typeface="Amiri" pitchFamily="2" charset="-78"/>
                 <a:cs typeface="Amiri" pitchFamily="2" charset="-78"/>
               </a:rPr>
               <a:t>م</a:t>
@@ -4477,6 +4502,7 @@
                   <a:srgbClr val="8A6D1E"/>
                 </a:solidFill>
                 <a:latin typeface="Amiri" pitchFamily="2" charset="-78"/>
+                <a:ea typeface="Amiri" pitchFamily="2" charset="-78"/>
                 <a:cs typeface="Amiri" pitchFamily="2" charset="-78"/>
               </a:rPr>
               <a:t>نَمُوذَجُ الإِجَابَةِ</a:t>
@@ -4590,6 +4616,7 @@
                   <a:srgbClr val="1F2A37"/>
                 </a:solidFill>
                 <a:latin typeface="Amiri" pitchFamily="2" charset="-78"/>
+                <a:ea typeface="Amiri" pitchFamily="2" charset="-78"/>
                 <a:cs typeface="Amiri" pitchFamily="2" charset="-78"/>
               </a:rPr>
               <a:t>عَزِيزَتِي لَيْلَى،</a:t>
@@ -4609,6 +4636,7 @@
                   <a:srgbClr val="1F2A37"/>
                 </a:solidFill>
                 <a:latin typeface="Amiri" pitchFamily="2" charset="-78"/>
+                <a:ea typeface="Amiri" pitchFamily="2" charset="-78"/>
                 <a:cs typeface="Amiri" pitchFamily="2" charset="-78"/>
               </a:rPr>
               <a:t>مَرَّ أُسْبُوعِيَ الأَوَّلُ فِي الكُلِّيَّةِ بِسُرْعَةٍ! المَبْنَى أَكْبَرُ بِكَثِيرٍ مِنْ مَدْرَسَتِنَا القَدِيمَةِ، وَفِيهِ مُخْتَبَرَاتٌ حَدِيثَةٌ وَمَكْتَبَةٌ تَفْتَحُ حَتَّى المَسَاءِ. اخْتَرْتُ الأَحْيَاءَ وَالكِيمْيَاءَ وَعِلْمَ النَّفْسِ، وَأَكْثَرُ مَا أَعْجَبَنِي أَنَّ الأَسَاتِذَةَ يُعَامِلُونَنَا كَالكِبَارِ، فَنُنَظِّمُ وَقْتَنَا بِأَنْفُسِنَا. وَقَدْ تَعَرَّفْتُ عَلَى زَمِيلَاتٍ لَطِيفَاتٍ مِنْ بُلْدَانٍ مُخْتَلِفَةٍ، فَلَمْ أَشْعُرْ بِالوَحْدَةِ أَبَدًا. صَحِيحٌ أَنَّ الوَاجِبَاتِ كَثِيرَةٌ، وَأَنَّنِي أَعْمَلُ أَيْضًا فِي صَيْدَلِيَّةٍ أَيَّامَ السَّبْتِ، غَيْرَ أَنَّ التَّجْرِبَةَ تُعَلِّمُنِي المَسْؤُولِيَّةَ وَتَنْظِيمَ الوَقْتِ. وَإِذَا حَصَلْتُ عَلَى دَرَجَاتٍ عَالِيَةٍ، فَسَأَتَقَدَّمُ لِكُلِّيَّةِ الطِّبِّ بَعْدَ سَنَتَيْنِ. أَخْبِرِينِي: هَلِ اخْتَرْتِ مَوَادَّكِ؟</a:t>
@@ -4628,6 +4656,7 @@
                   <a:srgbClr val="1F2A37"/>
                 </a:solidFill>
                 <a:latin typeface="Amiri" pitchFamily="2" charset="-78"/>
+                <a:ea typeface="Amiri" pitchFamily="2" charset="-78"/>
                 <a:cs typeface="Amiri" pitchFamily="2" charset="-78"/>
               </a:rPr>
               <a:t>بِمَحَبَّةٍ،</a:t>
@@ -4647,6 +4676,7 @@
                   <a:srgbClr val="1F2A37"/>
                 </a:solidFill>
                 <a:latin typeface="Amiri" pitchFamily="2" charset="-78"/>
+                <a:ea typeface="Amiri" pitchFamily="2" charset="-78"/>
                 <a:cs typeface="Amiri" pitchFamily="2" charset="-78"/>
               </a:rPr>
               <a:t>مَرْيَمُ</a:t>
@@ -4810,11 +4840,12 @@
               <a:buNone/>
             </a:pPr>
             <a:r>
-              <a:rPr lang="en-US" sz="950" b="1" dirty="0">
+              <a:rPr lang="ar-SA" sz="950" b="1" dirty="0">
                 <a:solidFill>
                   <a:srgbClr val="FFFFFF"/>
                 </a:solidFill>
                 <a:latin typeface="Calibri" pitchFamily="34" charset="0"/>
+                <a:ea typeface="Amiri" pitchFamily="2" charset="-78"/>
                 <a:cs typeface="Amiri" pitchFamily="2" charset="-78"/>
               </a:rPr>
               <a:t>أَكْبَرُ بِكَثِيرٍ مِنْ</a:t>
@@ -4875,11 +4906,12 @@
               <a:buNone/>
             </a:pPr>
             <a:r>
-              <a:rPr lang="en-US" sz="950" b="1" dirty="0">
+              <a:rPr lang="ar-SA" sz="950" b="1" dirty="0">
                 <a:solidFill>
                   <a:srgbClr val="FFFFFF"/>
                 </a:solidFill>
                 <a:latin typeface="Calibri" pitchFamily="34" charset="0"/>
+                <a:ea typeface="Amiri" pitchFamily="2" charset="-78"/>
                 <a:cs typeface="Amiri" pitchFamily="2" charset="-78"/>
               </a:rPr>
               <a:t>يُعَامِلُونَنَا كَالكِبَارِ</a:t>
@@ -4940,11 +4972,12 @@
               <a:buNone/>
             </a:pPr>
             <a:r>
-              <a:rPr lang="en-US" sz="950" b="1" dirty="0">
+              <a:rPr lang="ar-SA" sz="950" b="1" dirty="0">
                 <a:solidFill>
                   <a:srgbClr val="FFFFFF"/>
                 </a:solidFill>
                 <a:latin typeface="Calibri" pitchFamily="34" charset="0"/>
+                <a:ea typeface="Amiri" pitchFamily="2" charset="-78"/>
                 <a:cs typeface="Amiri" pitchFamily="2" charset="-78"/>
               </a:rPr>
               <a:t>صَحِيحٌ أَنَّ … غَيْرَ أَنَّ</a:t>
@@ -5005,11 +5038,12 @@
               <a:buNone/>
             </a:pPr>
             <a:r>
-              <a:rPr lang="en-US" sz="950" b="1" dirty="0">
+              <a:rPr lang="ar-SA" sz="950" b="1" dirty="0">
                 <a:solidFill>
                   <a:srgbClr val="FFFFFF"/>
                 </a:solidFill>
                 <a:latin typeface="Calibri" pitchFamily="34" charset="0"/>
+                <a:ea typeface="Amiri" pitchFamily="2" charset="-78"/>
                 <a:cs typeface="Amiri" pitchFamily="2" charset="-78"/>
               </a:rPr>
               <a:t>إِذَا حَصَلْتُ … فَسَأَتَقَدَّمُ</a:t>
@@ -5143,6 +5177,7 @@
                   <a:srgbClr val="D4AF37"/>
                 </a:solidFill>
                 <a:latin typeface="Amiri" pitchFamily="2" charset="-78"/>
+                <a:ea typeface="Amiri" pitchFamily="2" charset="-78"/>
                 <a:cs typeface="Amiri" pitchFamily="2" charset="-78"/>
               </a:rPr>
               <a:t>م</a:t>
@@ -5463,6 +5498,7 @@
                   <a:srgbClr val="8A6D1E"/>
                 </a:solidFill>
                 <a:latin typeface="Amiri" pitchFamily="2" charset="-78"/>
+                <a:ea typeface="Amiri" pitchFamily="2" charset="-78"/>
                 <a:cs typeface="Amiri" pitchFamily="2" charset="-78"/>
               </a:rPr>
               <a:t>اخْتَرْ عُنْوَانًا وَاحِدًا</a:t>
@@ -5743,6 +5779,7 @@
                   <a:srgbClr val="1B3B6F"/>
                 </a:solidFill>
                 <a:latin typeface="Amiri" pitchFamily="2" charset="-78"/>
+                <a:ea typeface="Amiri" pitchFamily="2" charset="-78"/>
                 <a:cs typeface="Amiri" pitchFamily="2" charset="-78"/>
               </a:rPr>
               <a:t>وَظِيفَةُ أَحْلَامِي</a:t>
@@ -5781,6 +5818,7 @@
                   <a:srgbClr val="1B3B6F"/>
                 </a:solidFill>
                 <a:latin typeface="Amiri" pitchFamily="2" charset="-78"/>
+                <a:ea typeface="Amiri" pitchFamily="2" charset="-78"/>
                 <a:cs typeface="Amiri" pitchFamily="2" charset="-78"/>
               </a:rPr>
               <a:t>(أ)</a:t>
@@ -5887,6 +5925,7 @@
                   <a:srgbClr val="1B3B6F"/>
                 </a:solidFill>
                 <a:latin typeface="Amiri" pitchFamily="2" charset="-78"/>
+                <a:ea typeface="Amiri" pitchFamily="2" charset="-78"/>
                 <a:cs typeface="Amiri" pitchFamily="2" charset="-78"/>
               </a:rPr>
               <a:t>الوَظِيفَةُ وَلِمَاذَا تُحِبُّهَا · دِرَاسَتُكَ فِي المَاضِي وَالآنَ · تَجْرِبَةُ عَمَلٍ · الصِّفَاتُ المَطْلُوبَةُ وَخُطَطُكَ</a:t>
@@ -6018,6 +6057,7 @@
                   <a:srgbClr val="1B3B6F"/>
                 </a:solidFill>
                 <a:latin typeface="Amiri" pitchFamily="2" charset="-78"/>
+                <a:ea typeface="Amiri" pitchFamily="2" charset="-78"/>
                 <a:cs typeface="Amiri" pitchFamily="2" charset="-78"/>
               </a:rPr>
               <a:t>الجَامِعَةُ أَمِ العَمَلُ بَعْدَ الثَّانَوِيَّةِ؟</a:t>
@@ -6056,6 +6096,7 @@
                   <a:srgbClr val="1B3B6F"/>
                 </a:solidFill>
                 <a:latin typeface="Amiri" pitchFamily="2" charset="-78"/>
+                <a:ea typeface="Amiri" pitchFamily="2" charset="-78"/>
                 <a:cs typeface="Amiri" pitchFamily="2" charset="-78"/>
               </a:rPr>
               <a:t>(ب)</a:t>
@@ -6159,6 +6200,7 @@
                   <a:srgbClr val="1B3B6F"/>
                 </a:solidFill>
                 <a:latin typeface="Amiri" pitchFamily="2" charset="-78"/>
+                <a:ea typeface="Amiri" pitchFamily="2" charset="-78"/>
                 <a:cs typeface="Amiri" pitchFamily="2" charset="-78"/>
               </a:rPr>
               <a:t>السُّؤَالُ · فَوَائِدُ الجَامِعَةِ وَفَوَائِدُ العَمَلِ · مِثَالٌ مِنْ حَيَاتِكَ · رَأْيُكَ</a:t>
@@ -6358,6 +6400,7 @@
                   <a:srgbClr val="D4AF37"/>
                 </a:solidFill>
                 <a:latin typeface="Amiri" pitchFamily="2" charset="-78"/>
+                <a:ea typeface="Amiri" pitchFamily="2" charset="-78"/>
                 <a:cs typeface="Amiri" pitchFamily="2" charset="-78"/>
               </a:rPr>
               <a:t>م</a:t>
@@ -6678,6 +6721,7 @@
                   <a:srgbClr val="8A6D1E"/>
                 </a:solidFill>
                 <a:latin typeface="Amiri" pitchFamily="2" charset="-78"/>
+                <a:ea typeface="Amiri" pitchFamily="2" charset="-78"/>
                 <a:cs typeface="Amiri" pitchFamily="2" charset="-78"/>
               </a:rPr>
               <a:t>خُطَّةُ الكِتَابَةِ</a:t>
@@ -7302,6 +7346,7 @@
                   <a:srgbClr val="1B3B6F"/>
                 </a:solidFill>
                 <a:latin typeface="Amiri" pitchFamily="2" charset="-78"/>
+                <a:ea typeface="Amiri" pitchFamily="2" charset="-78"/>
                 <a:cs typeface="Amiri" pitchFamily="2" charset="-78"/>
               </a:rPr>
               <a:t>كُنْتُ أَرْسُمُ البُيُوتَ كُلَّ يَوْمٍ.</a:t>
@@ -7401,6 +7446,7 @@
                   <a:srgbClr val="1B3B6F"/>
                 </a:solidFill>
                 <a:latin typeface="Amiri" pitchFamily="2" charset="-78"/>
+                <a:ea typeface="Amiri" pitchFamily="2" charset="-78"/>
                 <a:cs typeface="Amiri" pitchFamily="2" charset="-78"/>
               </a:rPr>
               <a:t>الآنَ أَدْرُسُ الرِّيَاضِيَّاتِ وَالفِيزْيَاءَ وَالفَنَّ.</a:t>
@@ -7500,6 +7546,7 @@
                   <a:srgbClr val="1B3B6F"/>
                 </a:solidFill>
                 <a:latin typeface="Amiri" pitchFamily="2" charset="-78"/>
+                <a:ea typeface="Amiri" pitchFamily="2" charset="-78"/>
                 <a:cs typeface="Amiri" pitchFamily="2" charset="-78"/>
               </a:rPr>
               <a:t>لِذٰلِكَ سَأَدْرُسُ الهَنْدَسَةَ فِي الجَامِعَةِ.</a:t>
@@ -7661,6 +7708,7 @@
                   <a:srgbClr val="1F2A37"/>
                 </a:solidFill>
                 <a:latin typeface="Amiri" pitchFamily="2" charset="-78"/>
+                <a:ea typeface="Amiri" pitchFamily="2" charset="-78"/>
                 <a:cs typeface="Amiri" pitchFamily="2" charset="-78"/>
               </a:rPr>
               <a:t>أ</a:t>
@@ -7687,6 +7735,7 @@
                   <a:srgbClr val="1F2A37"/>
                 </a:solidFill>
                 <a:latin typeface="Amiri" pitchFamily="2" charset="-78"/>
+                <a:ea typeface="Amiri" pitchFamily="2" charset="-78"/>
                 <a:cs typeface="Amiri" pitchFamily="2" charset="-78"/>
               </a:rPr>
               <a:t>ب</a:t>
@@ -7833,6 +7882,7 @@
                   <a:srgbClr val="D4AF37"/>
                 </a:solidFill>
                 <a:latin typeface="Amiri" pitchFamily="2" charset="-78"/>
+                <a:ea typeface="Amiri" pitchFamily="2" charset="-78"/>
                 <a:cs typeface="Amiri" pitchFamily="2" charset="-78"/>
               </a:rPr>
               <a:t>م</a:t>
@@ -8090,6 +8140,7 @@
                   <a:srgbClr val="8A6D1E"/>
                 </a:solidFill>
                 <a:latin typeface="Amiri" pitchFamily="2" charset="-78"/>
+                <a:ea typeface="Amiri" pitchFamily="2" charset="-78"/>
                 <a:cs typeface="Amiri" pitchFamily="2" charset="-78"/>
               </a:rPr>
               <a:t>أ</a:t>
@@ -8154,6 +8205,7 @@
                   <a:srgbClr val="1B3B6F"/>
                 </a:solidFill>
                 <a:latin typeface="Amiri" pitchFamily="2" charset="-78"/>
+                <a:ea typeface="Amiri" pitchFamily="2" charset="-78"/>
                 <a:cs typeface="Amiri" pitchFamily="2" charset="-78"/>
               </a:rPr>
               <a:t>أ</a:t>
@@ -8205,6 +8257,7 @@
                   <a:srgbClr val="8A6D1E"/>
                 </a:solidFill>
                 <a:latin typeface="Amiri" pitchFamily="2" charset="-78"/>
+                <a:ea typeface="Amiri" pitchFamily="2" charset="-78"/>
                 <a:cs typeface="Amiri" pitchFamily="2" charset="-78"/>
               </a:rPr>
               <a:t>نَمُوذَجُ الإِجَابَةِ</a:t>
@@ -8318,6 +8371,7 @@
                   <a:srgbClr val="1F2A37"/>
                 </a:solidFill>
                 <a:latin typeface="Amiri" pitchFamily="2" charset="-78"/>
+                <a:ea typeface="Amiri" pitchFamily="2" charset="-78"/>
                 <a:cs typeface="Amiri" pitchFamily="2" charset="-78"/>
               </a:rPr>
               <a:t>أُرِيدُ أَنْ أَكُونَ مُهَنْدِسَةً مِعْمَارِيَّةً فِي المُسْتَقْبَلِ. هٰذِهِ هِيَ وَظِيفَةُ أَحْلَامِي، لِأَنِّي أُحِبُّ الرَّسْمَ وَالرِّيَاضِيَّاتِ.</a:t>
@@ -8337,6 +8391,7 @@
                   <a:srgbClr val="1F2A37"/>
                 </a:solidFill>
                 <a:latin typeface="Amiri" pitchFamily="2" charset="-78"/>
+                <a:ea typeface="Amiri" pitchFamily="2" charset="-78"/>
                 <a:cs typeface="Amiri" pitchFamily="2" charset="-78"/>
               </a:rPr>
               <a:t>فِي المَدْرَسَةِ الابْتِدَائِيَّةِ كُنْتُ أَرْسُمُ البُيُوتَ وَالمَسَاجِدَ كُلَّ يَوْمٍ. الآنَ أَنَا فِي الصَّفِّ الحَادِي عَشَرَ، وَأَدْرُسُ الرِّيَاضِيَّاتِ وَالفِيزْيَاءَ وَالفَنَّ. أُرَاجِعُ كُلَّ مَسَاءٍ سَاعَةً وَنِصْفًا، لِأَنَّ الدَّرَجَاتِ العَالِيَةَ مُهِمَّةٌ لِهٰذِهِ المِهْنَةِ. مَادَّتِي المُفَضَّلَةُ الفَنُّ، لِأَنَّ مُعَلِّمَتِي تُشَجِّعُنِي دَائِمًا.</a:t>
@@ -8356,6 +8411,7 @@
                   <a:srgbClr val="1F2A37"/>
                 </a:solidFill>
                 <a:latin typeface="Amiri" pitchFamily="2" charset="-78"/>
+                <a:ea typeface="Amiri" pitchFamily="2" charset="-78"/>
                 <a:cs typeface="Amiri" pitchFamily="2" charset="-78"/>
               </a:rPr>
               <a:t>فِي الصَّيْفِ المَاضِي عَمِلْتُ أُسْبُوعًا فِي مَكْتَبٍ لِلْهَنْدَسَةِ. كَانَ المَكْتَبُ كَبِيرًا وَهَادِئًا، وَكَانَ الزُّمَلَاءُ لُطَفَاءَ جِدًّا. سَاعَدْتُ مُهَنْدِسَةً فِي رَسْمِ خَرِيطَةٍ لِمَدْرَسَةٍ جَدِيدَةٍ، وَتَعَلَّمْتُ كَيْفَ يَعْمَلُ الفَرِيقُ مَعًا. كَانَ العَمَلُ صَعْبًا وَطَوِيلًا، وَمَعَ ذٰلِكَ كَانَ مُمْتِعًا.</a:t>
@@ -8375,6 +8431,7 @@
                   <a:srgbClr val="1F2A37"/>
                 </a:solidFill>
                 <a:latin typeface="Amiri" pitchFamily="2" charset="-78"/>
+                <a:ea typeface="Amiri" pitchFamily="2" charset="-78"/>
                 <a:cs typeface="Amiri" pitchFamily="2" charset="-78"/>
               </a:rPr>
               <a:t>المُهَنْدِسَةُ الجَيِّدَةُ صَبُورَةٌ وَدَقِيقَةٌ وَمُبْدِعَةٌ. لِذٰلِكَ سَأَدْرُسُ الهَنْدَسَةَ فِي الجَامِعَةِ، ثُمَّ سَأَعْمَلُ فِي شَرِكَةٍ كَبِيرَةٍ. أَطْمَحُ إِلَى أَنْ أَبْنِيَ مَدَارِسَ جَمِيلَةً لِلْأَطْفَالِ فِي بَلَدِ وَالِدَيَّ، إِنْ شَاءَ اللّٰهُ.</a:t>
@@ -8538,11 +8595,12 @@
               <a:buNone/>
             </a:pPr>
             <a:r>
-              <a:rPr lang="en-US" sz="950" b="1" dirty="0">
+              <a:rPr lang="ar-SA" sz="950" b="1" dirty="0">
                 <a:solidFill>
                   <a:srgbClr val="FFFFFF"/>
                 </a:solidFill>
                 <a:latin typeface="Calibri" pitchFamily="34" charset="0"/>
+                <a:ea typeface="Amiri" pitchFamily="2" charset="-78"/>
                 <a:cs typeface="Amiri" pitchFamily="2" charset="-78"/>
               </a:rPr>
               <a:t>كُنْتُ أَرْسُمُ</a:t>
@@ -8603,11 +8661,12 @@
               <a:buNone/>
             </a:pPr>
             <a:r>
-              <a:rPr lang="en-US" sz="950" b="1" dirty="0">
+              <a:rPr lang="ar-SA" sz="950" b="1" dirty="0">
                 <a:solidFill>
                   <a:srgbClr val="FFFFFF"/>
                 </a:solidFill>
                 <a:latin typeface="Calibri" pitchFamily="34" charset="0"/>
+                <a:ea typeface="Amiri" pitchFamily="2" charset="-78"/>
                 <a:cs typeface="Amiri" pitchFamily="2" charset="-78"/>
               </a:rPr>
               <a:t>عَمِلْتُ أُسْبُوعًا</a:t>
@@ -8668,11 +8727,12 @@
               <a:buNone/>
             </a:pPr>
             <a:r>
-              <a:rPr lang="en-US" sz="950" b="1" dirty="0">
+              <a:rPr lang="ar-SA" sz="950" b="1" dirty="0">
                 <a:solidFill>
                   <a:srgbClr val="FFFFFF"/>
                 </a:solidFill>
                 <a:latin typeface="Calibri" pitchFamily="34" charset="0"/>
+                <a:ea typeface="Amiri" pitchFamily="2" charset="-78"/>
                 <a:cs typeface="Amiri" pitchFamily="2" charset="-78"/>
               </a:rPr>
               <a:t>وَمَعَ ذٰلِكَ</a:t>
@@ -8733,11 +8793,12 @@
               <a:buNone/>
             </a:pPr>
             <a:r>
-              <a:rPr lang="en-US" sz="950" b="1" dirty="0">
+              <a:rPr lang="ar-SA" sz="950" b="1" dirty="0">
                 <a:solidFill>
                   <a:srgbClr val="FFFFFF"/>
                 </a:solidFill>
                 <a:latin typeface="Calibri" pitchFamily="34" charset="0"/>
+                <a:ea typeface="Amiri" pitchFamily="2" charset="-78"/>
                 <a:cs typeface="Amiri" pitchFamily="2" charset="-78"/>
               </a:rPr>
               <a:t>أَطْمَحُ إِلَى أَنْ</a:t>
@@ -8871,6 +8932,7 @@
                   <a:srgbClr val="D4AF37"/>
                 </a:solidFill>
                 <a:latin typeface="Amiri" pitchFamily="2" charset="-78"/>
+                <a:ea typeface="Amiri" pitchFamily="2" charset="-78"/>
                 <a:cs typeface="Amiri" pitchFamily="2" charset="-78"/>
               </a:rPr>
               <a:t>م</a:t>
@@ -9128,6 +9190,7 @@
                   <a:srgbClr val="8A6D1E"/>
                 </a:solidFill>
                 <a:latin typeface="Amiri" pitchFamily="2" charset="-78"/>
+                <a:ea typeface="Amiri" pitchFamily="2" charset="-78"/>
                 <a:cs typeface="Amiri" pitchFamily="2" charset="-78"/>
               </a:rPr>
               <a:t>أ</a:t>
@@ -9192,6 +9255,7 @@
                   <a:srgbClr val="1B3B6F"/>
                 </a:solidFill>
                 <a:latin typeface="Amiri" pitchFamily="2" charset="-78"/>
+                <a:ea typeface="Amiri" pitchFamily="2" charset="-78"/>
                 <a:cs typeface="Amiri" pitchFamily="2" charset="-78"/>
               </a:rPr>
               <a:t>أ</a:t>
@@ -9243,6 +9307,7 @@
                   <a:srgbClr val="8A6D1E"/>
                 </a:solidFill>
                 <a:latin typeface="Amiri" pitchFamily="2" charset="-78"/>
+                <a:ea typeface="Amiri" pitchFamily="2" charset="-78"/>
                 <a:cs typeface="Amiri" pitchFamily="2" charset="-78"/>
               </a:rPr>
               <a:t>نَمُوذَجُ الإِجَابَةِ</a:t>
@@ -9356,6 +9421,7 @@
                   <a:srgbClr val="1F2A37"/>
                 </a:solidFill>
                 <a:latin typeface="Amiri" pitchFamily="2" charset="-78"/>
+                <a:ea typeface="Amiri" pitchFamily="2" charset="-78"/>
                 <a:cs typeface="Amiri" pitchFamily="2" charset="-78"/>
               </a:rPr>
               <a:t>مُنْذُ أَنْ كُنْتُ فِي السَّابِعَةِ، وَأَنَا أَمْلَأُ دَفَاتِرِي بِرُسُومِ بُيُوتٍ وَمَسَاجِدَ وَجُسُورٍ خَيَالِيَّةٍ؛ فَلَمْ يَكُنْ غَرِيبًا أَنْ تُصْبِحَ الهَنْدَسَةُ المِعْمَارِيَّةُ وَظِيفَةَ أَحْلَامِي.</a:t>
@@ -9375,6 +9441,7 @@
                   <a:srgbClr val="1F2A37"/>
                 </a:solidFill>
                 <a:latin typeface="Amiri" pitchFamily="2" charset="-78"/>
+                <a:ea typeface="Amiri" pitchFamily="2" charset="-78"/>
                 <a:cs typeface="Amiri" pitchFamily="2" charset="-78"/>
               </a:rPr>
               <a:t>وَمَعَ أَنَّ كَثِيرِينَ يَظُنُّونَ أَنَّ المُهَنْدِسَ المِعْمَارِيَّ رَسَّامٌ فَقَطْ، فَإِنَّ هٰذِهِ المِهْنَةَ تَجْمَعُ بَيْنَ الفَنِّ وَالعِلْمِ؛ لِذٰلِكَ اخْتَرْتُ الرِّيَاضِيَّاتِ وَالفِيزْيَاءَ وَالفَنَّ، وَأُخَصِّصُ كُلَّ مَسَاءٍ سَاعَةً لِلرَّسْمِ الهَنْدَسِيِّ. كَمَا انْضَمَمْتُ إِلَى دَوْرَةٍ مَسَائِيَّةٍ فِي التَّصْمِيمِ بِالحَاسُوبِ، وَحَصَلْتُ عَلَى شَهَادَتِهَا الأُولَى.</a:t>
@@ -9394,6 +9461,7 @@
                   <a:srgbClr val="1F2A37"/>
                 </a:solidFill>
                 <a:latin typeface="Amiri" pitchFamily="2" charset="-78"/>
+                <a:ea typeface="Amiri" pitchFamily="2" charset="-78"/>
                 <a:cs typeface="Amiri" pitchFamily="2" charset="-78"/>
               </a:rPr>
               <a:t>وَقَدْ تَأَكَّدَ اخْتِيَارِي حِينَ تَدَرَّبْتُ أُسْبُوعًا فِي مَكْتَبٍ هَنْدَسِيٍّ مَشْهُورٍ؛ إِذْ رَافَقْتُ مُهَنْدِسَةً تُصَمِّمُ مَدْرَسَةً صَدِيقَةً لِلْبِيئَةِ، فَرَأَيْتُ كَيْفَ تُصْغِي إِلَى المُعَلِّمِينَ وَالأَهَالِي قَبْلَ أَنْ تَرْسُمَ خَطًّا وَاحِدًا عَلَى الوَرَقِ. عِنْدَئِذٍ فَهِمْتُ أَنَّ الصَّبْرَ وَالاسْتِمَاعَ لَا يَقِلَّانِ أَهَمِّيَّةً عَنِ المَوْهِبَةِ.</a:t>
@@ -9413,6 +9481,7 @@
                   <a:srgbClr val="1F2A37"/>
                 </a:solidFill>
                 <a:latin typeface="Amiri" pitchFamily="2" charset="-78"/>
+                <a:ea typeface="Amiri" pitchFamily="2" charset="-78"/>
                 <a:cs typeface="Amiri" pitchFamily="2" charset="-78"/>
               </a:rPr>
               <a:t>لِذٰلِكَ أَطْمَحُ إِلَى دِرَاسَةِ الهَنْدَسَةِ المِعْمَارِيَّةِ، ثُمَّ تَصْمِيمِ مَدَارِسَ تَدْخُلُهَا الشَّمْسُ وَيُحِبُّهَا الأَطْفَالُ، فِي المُدُنِ وَالقُرَى عَلَى السَّوَاءِ. صَحِيحٌ أَنَّ الدِّرَاسَةَ تَسْتَغْرِقُ سَبْعَ سَنَوَاتٍ، غَيْرَ أَنَّنِي لَوْ خُيِّرْتُ مِنْ جَدِيدٍ، لَاخْتَرْتُ الطَّرِيقَ نَفْسَهُ.</a:t>
@@ -9511,11 +9580,12 @@
               <a:buNone/>
             </a:pPr>
             <a:r>
-              <a:rPr lang="en-US" sz="950" b="1" dirty="0">
+              <a:rPr lang="ar-SA" sz="950" b="1" dirty="0">
                 <a:solidFill>
                   <a:srgbClr val="FFFFFF"/>
                 </a:solidFill>
                 <a:latin typeface="Calibri" pitchFamily="34" charset="0"/>
+                <a:ea typeface="Amiri" pitchFamily="2" charset="-78"/>
                 <a:cs typeface="Amiri" pitchFamily="2" charset="-78"/>
               </a:rPr>
               <a:t>مُنْذُ أَنْ كُنْتُ … وَأَنَا</a:t>
@@ -9576,11 +9646,12 @@
               <a:buNone/>
             </a:pPr>
             <a:r>
-              <a:rPr lang="en-US" sz="950" b="1" dirty="0">
+              <a:rPr lang="ar-SA" sz="950" b="1" dirty="0">
                 <a:solidFill>
                   <a:srgbClr val="FFFFFF"/>
                 </a:solidFill>
                 <a:latin typeface="Calibri" pitchFamily="34" charset="0"/>
+                <a:ea typeface="Amiri" pitchFamily="2" charset="-78"/>
                 <a:cs typeface="Amiri" pitchFamily="2" charset="-78"/>
               </a:rPr>
               <a:t>مَعَ أَنَّ … فَإِنَّ</a:t>
@@ -9641,11 +9712,12 @@
               <a:buNone/>
             </a:pPr>
             <a:r>
-              <a:rPr lang="en-US" sz="950" b="1" dirty="0">
+              <a:rPr lang="ar-SA" sz="950" b="1" dirty="0">
                 <a:solidFill>
                   <a:srgbClr val="FFFFFF"/>
                 </a:solidFill>
                 <a:latin typeface="Calibri" pitchFamily="34" charset="0"/>
+                <a:ea typeface="Amiri" pitchFamily="2" charset="-78"/>
                 <a:cs typeface="Amiri" pitchFamily="2" charset="-78"/>
               </a:rPr>
               <a:t>لَا يَقِلَّانِ أَهَمِّيَّةً عَنْ</a:t>
@@ -9706,11 +9778,12 @@
               <a:buNone/>
             </a:pPr>
             <a:r>
-              <a:rPr lang="en-US" sz="950" b="1" dirty="0">
+              <a:rPr lang="ar-SA" sz="950" b="1" dirty="0">
                 <a:solidFill>
                   <a:srgbClr val="FFFFFF"/>
                 </a:solidFill>
                 <a:latin typeface="Calibri" pitchFamily="34" charset="0"/>
+                <a:ea typeface="Amiri" pitchFamily="2" charset="-78"/>
                 <a:cs typeface="Amiri" pitchFamily="2" charset="-78"/>
               </a:rPr>
               <a:t>لَوْ خُيِّرْتُ … لَاخْتَرْتُ</a:t>
@@ -9844,6 +9917,7 @@
                   <a:srgbClr val="D4AF37"/>
                 </a:solidFill>
                 <a:latin typeface="Amiri" pitchFamily="2" charset="-78"/>
+                <a:ea typeface="Amiri" pitchFamily="2" charset="-78"/>
                 <a:cs typeface="Amiri" pitchFamily="2" charset="-78"/>
               </a:rPr>
               <a:t>م</a:t>
@@ -10101,6 +10175,7 @@
                   <a:srgbClr val="8A6D1E"/>
                 </a:solidFill>
                 <a:latin typeface="Amiri" pitchFamily="2" charset="-78"/>
+                <a:ea typeface="Amiri" pitchFamily="2" charset="-78"/>
                 <a:cs typeface="Amiri" pitchFamily="2" charset="-78"/>
               </a:rPr>
               <a:t>ب</a:t>
@@ -10165,6 +10240,7 @@
                   <a:srgbClr val="1B3B6F"/>
                 </a:solidFill>
                 <a:latin typeface="Amiri" pitchFamily="2" charset="-78"/>
+                <a:ea typeface="Amiri" pitchFamily="2" charset="-78"/>
                 <a:cs typeface="Amiri" pitchFamily="2" charset="-78"/>
               </a:rPr>
               <a:t>ب</a:t>
@@ -10216,6 +10292,7 @@
                   <a:srgbClr val="8A6D1E"/>
                 </a:solidFill>
                 <a:latin typeface="Amiri" pitchFamily="2" charset="-78"/>
+                <a:ea typeface="Amiri" pitchFamily="2" charset="-78"/>
                 <a:cs typeface="Amiri" pitchFamily="2" charset="-78"/>
               </a:rPr>
               <a:t>نَمُوذَجُ الإِجَابَةِ</a:t>
@@ -10329,6 +10406,7 @@
                   <a:srgbClr val="1F2A37"/>
                 </a:solidFill>
                 <a:latin typeface="Amiri" pitchFamily="2" charset="-78"/>
+                <a:ea typeface="Amiri" pitchFamily="2" charset="-78"/>
                 <a:cs typeface="Amiri" pitchFamily="2" charset="-78"/>
               </a:rPr>
               <a:t>بَعْدَ امْتِحَانَاتِ الثَّانَوِيَّةِ، يَقِفُ كَثِيرٌ مِنَ الشَّبَابِ وَأُسَرِهِمْ أَمَامَ سُؤَالٍ صَعْبٍ: هَلْ يَدْخُلُونَ الجَامِعَةَ، أَمْ يَبْدَؤُونَ العَمَلَ مُبَاشَرَةً؟ وَلِكُلِّ طَرِيقٍ مُؤَيِّدُونَ وَمُعَارِضُونَ.</a:t>
@@ -10348,6 +10426,7 @@
                   <a:srgbClr val="1F2A37"/>
                 </a:solidFill>
                 <a:latin typeface="Amiri" pitchFamily="2" charset="-78"/>
+                <a:ea typeface="Amiri" pitchFamily="2" charset="-78"/>
                 <a:cs typeface="Amiri" pitchFamily="2" charset="-78"/>
               </a:rPr>
               <a:t>مِنْ نَاحِيَةٍ، تَفْتَحُ الشَّهَادَةُ الجَامِعِيَّةُ أَبْوَابَ مِهَنٍ كَثِيرَةٍ، كَالطِّبِّ وَالهَنْدَسَةِ وَالقَانُونِ، وَتُتِيحُ لِلطَّالِبِ أَنْ يَنْضُجَ وَيَكْتَشِفَ اهْتِمَامَاتِهِ. كَمَا يَبْنِي عَلَاقَاتٍ وَصَدَاقَاتٍ قَدْ تُفِيدُهُ طَوَالَ حَيَاتِهِ المِهْنِيَّةِ. وَمِنْ نَاحِيَةٍ أُخْرَى، تُكَلِّفُ الجَامِعَةُ كَثِيرًا، بَيْنَمَا يَكْسِبُ مَنْ يَبْدَأُ العَمَلَ مَالًا وَخِبْرَةً عَمَلِيَّةً مُبَكِّرَةً، دُونَ أَنْ يَتَحَمَّلَ دُيُونًا كَبِيرَةً.</a:t>
@@ -10367,6 +10446,7 @@
                   <a:srgbClr val="1F2A37"/>
                 </a:solidFill>
                 <a:latin typeface="Amiri" pitchFamily="2" charset="-78"/>
+                <a:ea typeface="Amiri" pitchFamily="2" charset="-78"/>
                 <a:cs typeface="Amiri" pitchFamily="2" charset="-78"/>
               </a:rPr>
               <a:t>فَأَخِي مَثَلًا تَرَكَ الدِّرَاسَةَ بَعْدَ الثَّانَوِيَّةِ، وَالْتَحَقَ بِتَدْرِيبٍ مِهْنِيٍّ فِي شَرِكَةٍ لِلْكَهْرَبَاءِ، وَهُوَ اليَوْمَ فَنِّيٌّ مَاهِرٌ يَدْرُسُ فِي المَسَاءِ عَلَى حِسَابِ الشَّرِكَةِ. أَمَّا ابْنَةُ عَمِّي فَتَخَرَّجَتْ مِنَ الجَامِعَةِ، وَمَا زَالَتْ تَبْحَثُ عَنْ وَظِيفَةٍ مُنَاسِبَةٍ لِتَخَصُّصِهَا مُنْذُ سَنَةٍ كَامِلَةٍ.</a:t>
@@ -10386,6 +10466,7 @@
                   <a:srgbClr val="1F2A37"/>
                 </a:solidFill>
                 <a:latin typeface="Amiri" pitchFamily="2" charset="-78"/>
+                <a:ea typeface="Amiri" pitchFamily="2" charset="-78"/>
                 <a:cs typeface="Amiri" pitchFamily="2" charset="-78"/>
               </a:rPr>
               <a:t>أَرَى أَنَّهُ لَا يُوجَدُ طَرِيقٌ وَاحِدٌ صَحِيحٌ لِلْجَمِيعِ؛ فَالمُهِمُّ أَنْ يَعْرِفَ الإِنْسَانُ نَفْسَهُ وَأَهْدَافَهُ وَظُرُوفَهُ المَالِيَّةَ. وَإِذَا اخْتَارَ عَنْ قَنَاعَةٍ، فَسَيَنْجَحُ فِي أَيِّ طَرِيقٍ يَسْلُكُهُ بِإِذْنِ اللّٰهِ.</a:t>
@@ -10484,11 +10565,12 @@
               <a:buNone/>
             </a:pPr>
             <a:r>
-              <a:rPr lang="en-US" sz="950" b="1" dirty="0">
+              <a:rPr lang="ar-SA" sz="950" b="1" dirty="0">
                 <a:solidFill>
                   <a:srgbClr val="FFFFFF"/>
                 </a:solidFill>
                 <a:latin typeface="Calibri" pitchFamily="34" charset="0"/>
+                <a:ea typeface="Amiri" pitchFamily="2" charset="-78"/>
                 <a:cs typeface="Amiri" pitchFamily="2" charset="-78"/>
               </a:rPr>
               <a:t>هَلْ … أَمْ</a:t>
@@ -10549,11 +10631,12 @@
               <a:buNone/>
             </a:pPr>
             <a:r>
-              <a:rPr lang="en-US" sz="950" b="1" dirty="0">
+              <a:rPr lang="ar-SA" sz="950" b="1" dirty="0">
                 <a:solidFill>
                   <a:srgbClr val="FFFFFF"/>
                 </a:solidFill>
                 <a:latin typeface="Calibri" pitchFamily="34" charset="0"/>
+                <a:ea typeface="Amiri" pitchFamily="2" charset="-78"/>
                 <a:cs typeface="Amiri" pitchFamily="2" charset="-78"/>
               </a:rPr>
               <a:t>بَيْنَمَا يَكْسِبُ</a:t>
@@ -10614,11 +10697,12 @@
               <a:buNone/>
             </a:pPr>
             <a:r>
-              <a:rPr lang="en-US" sz="950" b="1" dirty="0">
+              <a:rPr lang="ar-SA" sz="950" b="1" dirty="0">
                 <a:solidFill>
                   <a:srgbClr val="FFFFFF"/>
                 </a:solidFill>
                 <a:latin typeface="Calibri" pitchFamily="34" charset="0"/>
+                <a:ea typeface="Amiri" pitchFamily="2" charset="-78"/>
                 <a:cs typeface="Amiri" pitchFamily="2" charset="-78"/>
               </a:rPr>
               <a:t>أَمَّا ابْنَةُ عَمِّي فَتَخَرَّجَتْ</a:t>
@@ -10679,11 +10763,12 @@
               <a:buNone/>
             </a:pPr>
             <a:r>
-              <a:rPr lang="en-US" sz="950" b="1" dirty="0">
+              <a:rPr lang="ar-SA" sz="950" b="1" dirty="0">
                 <a:solidFill>
                   <a:srgbClr val="FFFFFF"/>
                 </a:solidFill>
                 <a:latin typeface="Calibri" pitchFamily="34" charset="0"/>
+                <a:ea typeface="Amiri" pitchFamily="2" charset="-78"/>
                 <a:cs typeface="Amiri" pitchFamily="2" charset="-78"/>
               </a:rPr>
               <a:t>إِذَا اخْتَارَ … فَسَيَنْجَحُ</a:t>
@@ -10817,6 +10902,7 @@
                   <a:srgbClr val="D4AF37"/>
                 </a:solidFill>
                 <a:latin typeface="Amiri" pitchFamily="2" charset="-78"/>
+                <a:ea typeface="Amiri" pitchFamily="2" charset="-78"/>
                 <a:cs typeface="Amiri" pitchFamily="2" charset="-78"/>
               </a:rPr>
               <a:t>م</a:t>
@@ -11137,6 +11223,7 @@
                   <a:srgbClr val="8A6D1E"/>
                 </a:solidFill>
                 <a:latin typeface="Amiri" pitchFamily="2" charset="-78"/>
+                <a:ea typeface="Amiri" pitchFamily="2" charset="-78"/>
                 <a:cs typeface="Amiri" pitchFamily="2" charset="-78"/>
               </a:rPr>
               <a:t>قَيِّمْ عَمَلَكَ</a:t>
@@ -12381,6 +12468,7 @@
                   <a:srgbClr val="FFFFFF"/>
                 </a:solidFill>
                 <a:latin typeface="Amiri" pitchFamily="2" charset="-78"/>
+                <a:ea typeface="Amiri" pitchFamily="2" charset="-78"/>
                 <a:cs typeface="Amiri" pitchFamily="2" charset="-78"/>
               </a:rPr>
               <a:t>أَحْسَنْتُمْ! إِلَى اللِّقَاءِ</a:t>
@@ -12533,6 +12621,7 @@
                   <a:srgbClr val="D4AF37"/>
                 </a:solidFill>
                 <a:latin typeface="Amiri" pitchFamily="2" charset="-78"/>
+                <a:ea typeface="Amiri" pitchFamily="2" charset="-78"/>
                 <a:cs typeface="Amiri" pitchFamily="2" charset="-78"/>
               </a:rPr>
               <a:t>المِحْوَرُ التَّالِي</a:t>
@@ -12666,6 +12755,7 @@
                   <a:srgbClr val="D4AF37"/>
                 </a:solidFill>
                 <a:latin typeface="Amiri" pitchFamily="2" charset="-78"/>
+                <a:ea typeface="Amiri" pitchFamily="2" charset="-78"/>
                 <a:cs typeface="Amiri" pitchFamily="2" charset="-78"/>
               </a:rPr>
               <a:t>م</a:t>
@@ -12986,6 +13076,7 @@
                   <a:srgbClr val="8A6D1E"/>
                 </a:solidFill>
                 <a:latin typeface="Amiri" pitchFamily="2" charset="-78"/>
+                <a:ea typeface="Amiri" pitchFamily="2" charset="-78"/>
                 <a:cs typeface="Amiri" pitchFamily="2" charset="-78"/>
               </a:rPr>
               <a:t>آدَابُ الصَّفِّ</a:t>
@@ -14517,6 +14608,7 @@
                   <a:srgbClr val="D4AF37"/>
                 </a:solidFill>
                 <a:latin typeface="Amiri" pitchFamily="2" charset="-78"/>
+                <a:ea typeface="Amiri" pitchFamily="2" charset="-78"/>
                 <a:cs typeface="Amiri" pitchFamily="2" charset="-78"/>
               </a:rPr>
               <a:t>م</a:t>
@@ -14837,6 +14929,7 @@
                   <a:srgbClr val="8A6D1E"/>
                 </a:solidFill>
                 <a:latin typeface="Amiri" pitchFamily="2" charset="-78"/>
+                <a:ea typeface="Amiri" pitchFamily="2" charset="-78"/>
                 <a:cs typeface="Amiri" pitchFamily="2" charset="-78"/>
               </a:rPr>
               <a:t>خَرِيطَةُ الوَرْشَةِ</a:t>
@@ -15151,6 +15244,7 @@
                   <a:srgbClr val="1B3B6F"/>
                 </a:solidFill>
                 <a:latin typeface="Amiri" pitchFamily="2" charset="-78"/>
+                <a:ea typeface="Amiri" pitchFamily="2" charset="-78"/>
                 <a:cs typeface="Amiri" pitchFamily="2" charset="-78"/>
               </a:rPr>
               <a:t>كَيْفَ</a:t>
@@ -15427,6 +15521,7 @@
                   <a:srgbClr val="1E6B52"/>
                 </a:solidFill>
                 <a:latin typeface="Amiri" pitchFamily="2" charset="-78"/>
+                <a:ea typeface="Amiri" pitchFamily="2" charset="-78"/>
                 <a:cs typeface="Amiri" pitchFamily="2" charset="-78"/>
               </a:rPr>
               <a:t>الاسْتِمَارَةُ</a:t>
@@ -15703,6 +15798,7 @@
                   <a:srgbClr val="1E6B52"/>
                 </a:solidFill>
                 <a:latin typeface="Amiri" pitchFamily="2" charset="-78"/>
+                <a:ea typeface="Amiri" pitchFamily="2" charset="-78"/>
                 <a:cs typeface="Amiri" pitchFamily="2" charset="-78"/>
               </a:rPr>
               <a:t>الرِّسَالَةُ</a:t>
@@ -15979,6 +16075,7 @@
                   <a:srgbClr val="1E6B52"/>
                 </a:solidFill>
                 <a:latin typeface="Amiri" pitchFamily="2" charset="-78"/>
+                <a:ea typeface="Amiri" pitchFamily="2" charset="-78"/>
                 <a:cs typeface="Amiri" pitchFamily="2" charset="-78"/>
               </a:rPr>
               <a:t>المَقَالُ</a:t>
@@ -16255,6 +16352,7 @@
                   <a:srgbClr val="8A6D1E"/>
                 </a:solidFill>
                 <a:latin typeface="Amiri" pitchFamily="2" charset="-78"/>
+                <a:ea typeface="Amiri" pitchFamily="2" charset="-78"/>
                 <a:cs typeface="Amiri" pitchFamily="2" charset="-78"/>
               </a:rPr>
               <a:t>قَيِّمْ</a:t>
@@ -16498,6 +16596,7 @@
                   <a:srgbClr val="D4AF37"/>
                 </a:solidFill>
                 <a:latin typeface="Amiri" pitchFamily="2" charset="-78"/>
+                <a:ea typeface="Amiri" pitchFamily="2" charset="-78"/>
                 <a:cs typeface="Amiri" pitchFamily="2" charset="-78"/>
               </a:rPr>
               <a:t>م</a:t>
@@ -16818,6 +16917,7 @@
                   <a:srgbClr val="8A6D1E"/>
                 </a:solidFill>
                 <a:latin typeface="Amiri" pitchFamily="2" charset="-78"/>
+                <a:ea typeface="Amiri" pitchFamily="2" charset="-78"/>
                 <a:cs typeface="Amiri" pitchFamily="2" charset="-78"/>
               </a:rPr>
               <a:t>امْتِحَانُ الكِتَابَةِ</a:t>
@@ -17442,6 +17542,7 @@
                   <a:srgbClr val="1B3B6F"/>
                 </a:solidFill>
                 <a:latin typeface="Amiri" pitchFamily="2" charset="-78"/>
+                <a:ea typeface="Amiri" pitchFamily="2" charset="-78"/>
                 <a:cs typeface="Amiri" pitchFamily="2" charset="-78"/>
               </a:rPr>
               <a:t>المَبْنَى أَكْبَرُ بِكَثِيرٍ مِنْ مَدْرَسَتِنَا القَدِيمَةِ</a:t>
@@ -17541,6 +17642,7 @@
                   <a:srgbClr val="1B3B6F"/>
                 </a:solidFill>
                 <a:latin typeface="Amiri" pitchFamily="2" charset="-78"/>
+                <a:ea typeface="Amiri" pitchFamily="2" charset="-78"/>
                 <a:cs typeface="Amiri" pitchFamily="2" charset="-78"/>
               </a:rPr>
               <a:t>كُنْتُ أَرْسُمُ البُيُوتَ … الآنَ أَدْرُسُ …</a:t>
@@ -17640,6 +17742,7 @@
                   <a:srgbClr val="1B3B6F"/>
                 </a:solidFill>
                 <a:latin typeface="Amiri" pitchFamily="2" charset="-78"/>
+                <a:ea typeface="Amiri" pitchFamily="2" charset="-78"/>
                 <a:cs typeface="Amiri" pitchFamily="2" charset="-78"/>
               </a:rPr>
               <a:t>إِذَا حَصَلْتُ عَلَى دَرَجَاتٍ عَالِيَةٍ، فَسَأَتَقَدَّمُ …</a:t>
@@ -17811,6 +17914,7 @@
                   <a:srgbClr val="D4AF37"/>
                 </a:solidFill>
                 <a:latin typeface="Amiri" pitchFamily="2" charset="-78"/>
+                <a:ea typeface="Amiri" pitchFamily="2" charset="-78"/>
                 <a:cs typeface="Amiri" pitchFamily="2" charset="-78"/>
               </a:rPr>
               <a:t>م</a:t>
@@ -18131,6 +18235,7 @@
                   <a:srgbClr val="8A6D1E"/>
                 </a:solidFill>
                 <a:latin typeface="Amiri" pitchFamily="2" charset="-78"/>
+                <a:ea typeface="Amiri" pitchFamily="2" charset="-78"/>
                 <a:cs typeface="Amiri" pitchFamily="2" charset="-78"/>
               </a:rPr>
               <a:t>اسْتِمَارَةُ طَلَبِ عَمَلٍ جُزْئِيٍّ</a:t>
@@ -18487,6 +18592,7 @@
                   <a:srgbClr val="1B3B6F"/>
                 </a:solidFill>
                 <a:latin typeface="Amiri" pitchFamily="2" charset="-78"/>
+                <a:ea typeface="Amiri" pitchFamily="2" charset="-78"/>
                 <a:cs typeface="Amiri" pitchFamily="2" charset="-78"/>
               </a:rPr>
               <a:t>الاسْمُ الكَامِلُ</a:t>
@@ -18731,6 +18837,7 @@
                   <a:srgbClr val="1B3B6F"/>
                 </a:solidFill>
                 <a:latin typeface="Amiri" pitchFamily="2" charset="-78"/>
+                <a:ea typeface="Amiri" pitchFamily="2" charset="-78"/>
                 <a:cs typeface="Amiri" pitchFamily="2" charset="-78"/>
               </a:rPr>
               <a:t>المَدْرَسَةُ أَوِ الكُلِّيَّةُ</a:t>
@@ -18975,6 +19082,7 @@
                   <a:srgbClr val="1B3B6F"/>
                 </a:solidFill>
                 <a:latin typeface="Amiri" pitchFamily="2" charset="-78"/>
+                <a:ea typeface="Amiri" pitchFamily="2" charset="-78"/>
                 <a:cs typeface="Amiri" pitchFamily="2" charset="-78"/>
               </a:rPr>
               <a:t>الوَظِيفَةُ المَطْلُوبَةُ</a:t>
@@ -19219,6 +19327,7 @@
                   <a:srgbClr val="1B3B6F"/>
                 </a:solidFill>
                 <a:latin typeface="Amiri" pitchFamily="2" charset="-78"/>
+                <a:ea typeface="Amiri" pitchFamily="2" charset="-78"/>
                 <a:cs typeface="Amiri" pitchFamily="2" charset="-78"/>
               </a:rPr>
               <a:t>الأَيَّامُ المُنَاسِبَةُ</a:t>
@@ -19463,6 +19572,7 @@
                   <a:srgbClr val="1B3B6F"/>
                 </a:solidFill>
                 <a:latin typeface="Amiri" pitchFamily="2" charset="-78"/>
+                <a:ea typeface="Amiri" pitchFamily="2" charset="-78"/>
                 <a:cs typeface="Amiri" pitchFamily="2" charset="-78"/>
               </a:rPr>
               <a:t>صِفَتَانِ شَخْصِيَّتَانِ</a:t>
@@ -19707,6 +19817,7 @@
                   <a:srgbClr val="1B3B6F"/>
                 </a:solidFill>
                 <a:latin typeface="Amiri" pitchFamily="2" charset="-78"/>
+                <a:ea typeface="Amiri" pitchFamily="2" charset="-78"/>
                 <a:cs typeface="Amiri" pitchFamily="2" charset="-78"/>
               </a:rPr>
               <a:t>اللُّغَاتُ</a:t>
@@ -19951,6 +20062,7 @@
                   <a:srgbClr val="1B3B6F"/>
                 </a:solidFill>
                 <a:latin typeface="Amiri" pitchFamily="2" charset="-78"/>
+                <a:ea typeface="Amiri" pitchFamily="2" charset="-78"/>
                 <a:cs typeface="Amiri" pitchFamily="2" charset="-78"/>
               </a:rPr>
               <a:t>خِبْرَةٌ سَابِقَةٌ</a:t>
@@ -20130,6 +20242,7 @@
                   <a:srgbClr val="1B3B6F"/>
                 </a:solidFill>
                 <a:latin typeface="Amiri" pitchFamily="2" charset="-78"/>
+                <a:ea typeface="Amiri" pitchFamily="2" charset="-78"/>
                 <a:cs typeface="Amiri" pitchFamily="2" charset="-78"/>
               </a:rPr>
               <a:t>جُمْلَةٌ: لِمَاذَا تُرِيدُ هٰذَا العَمَلَ؟</a:t>
@@ -20339,6 +20452,7 @@
                   <a:srgbClr val="D4AF37"/>
                 </a:solidFill>
                 <a:latin typeface="Amiri" pitchFamily="2" charset="-78"/>
+                <a:ea typeface="Amiri" pitchFamily="2" charset="-78"/>
                 <a:cs typeface="Amiri" pitchFamily="2" charset="-78"/>
               </a:rPr>
               <a:t>م</a:t>
@@ -20659,6 +20773,7 @@
                   <a:srgbClr val="8A6D1E"/>
                 </a:solidFill>
                 <a:latin typeface="Amiri" pitchFamily="2" charset="-78"/>
+                <a:ea typeface="Amiri" pitchFamily="2" charset="-78"/>
                 <a:cs typeface="Amiri" pitchFamily="2" charset="-78"/>
               </a:rPr>
               <a:t>نَمُوذَجُ الإِجَابَةِ</a:t>
@@ -20977,6 +21092,7 @@
                   <a:srgbClr val="1B3B6F"/>
                 </a:solidFill>
                 <a:latin typeface="Amiri" pitchFamily="2" charset="-78"/>
+                <a:ea typeface="Amiri" pitchFamily="2" charset="-78"/>
                 <a:cs typeface="Amiri" pitchFamily="2" charset="-78"/>
               </a:rPr>
               <a:t>مَرْيَمُ حَسَنٌ</a:t>
@@ -21015,6 +21131,7 @@
                   <a:srgbClr val="1B3B6F"/>
                 </a:solidFill>
                 <a:latin typeface="Amiri" pitchFamily="2" charset="-78"/>
+                <a:ea typeface="Amiri" pitchFamily="2" charset="-78"/>
                 <a:cs typeface="Amiri" pitchFamily="2" charset="-78"/>
               </a:rPr>
               <a:t>الاسْمُ الكَامِلُ</a:t>
@@ -21156,6 +21273,7 @@
                   <a:srgbClr val="1B3B6F"/>
                 </a:solidFill>
                 <a:latin typeface="Amiri" pitchFamily="2" charset="-78"/>
+                <a:ea typeface="Amiri" pitchFamily="2" charset="-78"/>
                 <a:cs typeface="Amiri" pitchFamily="2" charset="-78"/>
               </a:rPr>
               <a:t>كُلِّيَّةُ النُّورِ</a:t>
@@ -21194,6 +21312,7 @@
                   <a:srgbClr val="1B3B6F"/>
                 </a:solidFill>
                 <a:latin typeface="Amiri" pitchFamily="2" charset="-78"/>
+                <a:ea typeface="Amiri" pitchFamily="2" charset="-78"/>
                 <a:cs typeface="Amiri" pitchFamily="2" charset="-78"/>
               </a:rPr>
               <a:t>المَدْرَسَةُ أَوِ الكُلِّيَّةُ</a:t>
@@ -21335,6 +21454,7 @@
                   <a:srgbClr val="1B3B6F"/>
                 </a:solidFill>
                 <a:latin typeface="Amiri" pitchFamily="2" charset="-78"/>
+                <a:ea typeface="Amiri" pitchFamily="2" charset="-78"/>
                 <a:cs typeface="Amiri" pitchFamily="2" charset="-78"/>
               </a:rPr>
               <a:t>مُسَاعِدَةٌ فِي صَيْدَلِيَّةٍ</a:t>
@@ -21373,6 +21493,7 @@
                   <a:srgbClr val="1B3B6F"/>
                 </a:solidFill>
                 <a:latin typeface="Amiri" pitchFamily="2" charset="-78"/>
+                <a:ea typeface="Amiri" pitchFamily="2" charset="-78"/>
                 <a:cs typeface="Amiri" pitchFamily="2" charset="-78"/>
               </a:rPr>
               <a:t>الوَظِيفَةُ المَطْلُوبَةُ</a:t>
@@ -21514,6 +21635,7 @@
                   <a:srgbClr val="1B3B6F"/>
                 </a:solidFill>
                 <a:latin typeface="Amiri" pitchFamily="2" charset="-78"/>
+                <a:ea typeface="Amiri" pitchFamily="2" charset="-78"/>
                 <a:cs typeface="Amiri" pitchFamily="2" charset="-78"/>
               </a:rPr>
               <a:t>السَّبْتُ وَالأَحَدُ</a:t>
@@ -21552,6 +21674,7 @@
                   <a:srgbClr val="1B3B6F"/>
                 </a:solidFill>
                 <a:latin typeface="Amiri" pitchFamily="2" charset="-78"/>
+                <a:ea typeface="Amiri" pitchFamily="2" charset="-78"/>
                 <a:cs typeface="Amiri" pitchFamily="2" charset="-78"/>
               </a:rPr>
               <a:t>الأَيَّامُ المُنَاسِبَةُ</a:t>
@@ -21693,6 +21816,7 @@
                   <a:srgbClr val="1B3B6F"/>
                 </a:solidFill>
                 <a:latin typeface="Amiri" pitchFamily="2" charset="-78"/>
+                <a:ea typeface="Amiri" pitchFamily="2" charset="-78"/>
                 <a:cs typeface="Amiri" pitchFamily="2" charset="-78"/>
               </a:rPr>
               <a:t>صَبُورَةٌ وَمُنَظَّمَةٌ</a:t>
@@ -21731,6 +21855,7 @@
                   <a:srgbClr val="1B3B6F"/>
                 </a:solidFill>
                 <a:latin typeface="Amiri" pitchFamily="2" charset="-78"/>
+                <a:ea typeface="Amiri" pitchFamily="2" charset="-78"/>
                 <a:cs typeface="Amiri" pitchFamily="2" charset="-78"/>
               </a:rPr>
               <a:t>صِفَتَانِ شَخْصِيَّتَانِ</a:t>
@@ -21872,6 +21997,7 @@
                   <a:srgbClr val="1B3B6F"/>
                 </a:solidFill>
                 <a:latin typeface="Amiri" pitchFamily="2" charset="-78"/>
+                <a:ea typeface="Amiri" pitchFamily="2" charset="-78"/>
                 <a:cs typeface="Amiri" pitchFamily="2" charset="-78"/>
               </a:rPr>
               <a:t>العَرَبِيَّةُ وَالإِنْجْلِيزِيَّةُ</a:t>
@@ -21910,6 +22036,7 @@
                   <a:srgbClr val="1B3B6F"/>
                 </a:solidFill>
                 <a:latin typeface="Amiri" pitchFamily="2" charset="-78"/>
+                <a:ea typeface="Amiri" pitchFamily="2" charset="-78"/>
                 <a:cs typeface="Amiri" pitchFamily="2" charset="-78"/>
               </a:rPr>
               <a:t>اللُّغَاتُ</a:t>
@@ -22051,6 +22178,7 @@
                   <a:srgbClr val="1B3B6F"/>
                 </a:solidFill>
                 <a:latin typeface="Amiri" pitchFamily="2" charset="-78"/>
+                <a:ea typeface="Amiri" pitchFamily="2" charset="-78"/>
                 <a:cs typeface="Amiri" pitchFamily="2" charset="-78"/>
               </a:rPr>
               <a:t>أُسْبُوعٌ فِي مُسْتَشْفًى</a:t>
@@ -22089,6 +22217,7 @@
                   <a:srgbClr val="1B3B6F"/>
                 </a:solidFill>
                 <a:latin typeface="Amiri" pitchFamily="2" charset="-78"/>
+                <a:ea typeface="Amiri" pitchFamily="2" charset="-78"/>
                 <a:cs typeface="Amiri" pitchFamily="2" charset="-78"/>
               </a:rPr>
               <a:t>خِبْرَةٌ سَابِقَةٌ</a:t>
@@ -22230,6 +22359,7 @@
                   <a:srgbClr val="1B3B6F"/>
                 </a:solidFill>
                 <a:latin typeface="Amiri" pitchFamily="2" charset="-78"/>
+                <a:ea typeface="Amiri" pitchFamily="2" charset="-78"/>
                 <a:cs typeface="Amiri" pitchFamily="2" charset="-78"/>
               </a:rPr>
               <a:t>أُرِيدُ هٰذَا العَمَلَ لِأَنِّي أَطْمَحُ إِلَى دِرَاسَةِ الطِّبِّ.</a:t>
@@ -22268,6 +22398,7 @@
                   <a:srgbClr val="1B3B6F"/>
                 </a:solidFill>
                 <a:latin typeface="Amiri" pitchFamily="2" charset="-78"/>
+                <a:ea typeface="Amiri" pitchFamily="2" charset="-78"/>
                 <a:cs typeface="Amiri" pitchFamily="2" charset="-78"/>
               </a:rPr>
               <a:t>جُمْلَةٌ: لِمَاذَا تُرِيدُ هٰذَا العَمَلَ؟</a:t>
@@ -22477,6 +22608,7 @@
                   <a:srgbClr val="D4AF37"/>
                 </a:solidFill>
                 <a:latin typeface="Amiri" pitchFamily="2" charset="-78"/>
+                <a:ea typeface="Amiri" pitchFamily="2" charset="-78"/>
                 <a:cs typeface="Amiri" pitchFamily="2" charset="-78"/>
               </a:rPr>
               <a:t>م</a:t>
@@ -22797,6 +22929,7 @@
                   <a:srgbClr val="8A6D1E"/>
                 </a:solidFill>
                 <a:latin typeface="Amiri" pitchFamily="2" charset="-78"/>
+                <a:ea typeface="Amiri" pitchFamily="2" charset="-78"/>
                 <a:cs typeface="Amiri" pitchFamily="2" charset="-78"/>
               </a:rPr>
               <a:t>أُسْبُوعِي الأَوَّلُ فِي الكُلِّيَّةِ</a:t>
@@ -23272,6 +23405,7 @@
                   <a:srgbClr val="1B3B6F"/>
                 </a:solidFill>
                 <a:latin typeface="Amiri" pitchFamily="2" charset="-78"/>
+                <a:ea typeface="Amiri" pitchFamily="2" charset="-78"/>
                 <a:cs typeface="Amiri" pitchFamily="2" charset="-78"/>
               </a:rPr>
               <a:t>الكُلِّيَّةُ كَبِيرَةٌ وَحَدِيثَةٌ، وَفِيهَا …</a:t>
@@ -23348,6 +23482,7 @@
                   <a:srgbClr val="1B3B6F"/>
                 </a:solidFill>
                 <a:latin typeface="Amiri" pitchFamily="2" charset="-78"/>
+                <a:ea typeface="Amiri" pitchFamily="2" charset="-78"/>
                 <a:cs typeface="Amiri" pitchFamily="2" charset="-78"/>
               </a:rPr>
               <a:t>مَادَّتِي المُفَضَّلَةُ … لِأَنَّ …</a:t>
@@ -23424,6 +23559,7 @@
                   <a:srgbClr val="1B3B6F"/>
                 </a:solidFill>
                 <a:latin typeface="Amiri" pitchFamily="2" charset="-78"/>
+                <a:ea typeface="Amiri" pitchFamily="2" charset="-78"/>
                 <a:cs typeface="Amiri" pitchFamily="2" charset="-78"/>
               </a:rPr>
               <a:t>بَدَأْتُ عَمَلًا جُزْئِيًّا فِي …</a:t>
@@ -23500,6 +23636,7 @@
                   <a:srgbClr val="1B3B6F"/>
                 </a:solidFill>
                 <a:latin typeface="Amiri" pitchFamily="2" charset="-78"/>
+                <a:ea typeface="Amiri" pitchFamily="2" charset="-78"/>
                 <a:cs typeface="Amiri" pitchFamily="2" charset="-78"/>
               </a:rPr>
               <a:t>فِي المُسْتَقْبَلِ سَأَدْرُسُ …</a:t>
@@ -23671,6 +23808,7 @@
                   <a:srgbClr val="D4AF37"/>
                 </a:solidFill>
                 <a:latin typeface="Amiri" pitchFamily="2" charset="-78"/>
+                <a:ea typeface="Amiri" pitchFamily="2" charset="-78"/>
                 <a:cs typeface="Amiri" pitchFamily="2" charset="-78"/>
               </a:rPr>
               <a:t>م</a:t>
@@ -23991,6 +24129,7 @@
                   <a:srgbClr val="8A6D1E"/>
                 </a:solidFill>
                 <a:latin typeface="Amiri" pitchFamily="2" charset="-78"/>
+                <a:ea typeface="Amiri" pitchFamily="2" charset="-78"/>
                 <a:cs typeface="Amiri" pitchFamily="2" charset="-78"/>
               </a:rPr>
               <a:t>نَصُّ السُّؤَالِ</a:t>
@@ -24271,6 +24410,7 @@
                   <a:srgbClr val="1B3B6F"/>
                 </a:solidFill>
                 <a:latin typeface="Amiri" pitchFamily="2" charset="-78"/>
+                <a:ea typeface="Amiri" pitchFamily="2" charset="-78"/>
                 <a:cs typeface="Amiri" pitchFamily="2" charset="-78"/>
               </a:rPr>
               <a:t>اكْتُبِي رِسَالَةً إِلَى صَدِيقَتِكِ عَنْ أُسْبُوعِكِ الأَوَّلِ فِي الكُلِّيَّةِ (٨٠–٩٠ كَلِمَةً).</a:t>
@@ -24412,6 +24552,7 @@
                   <a:srgbClr val="1B3B6F"/>
                 </a:solidFill>
                 <a:latin typeface="Amiri" pitchFamily="2" charset="-78"/>
+                <a:ea typeface="Amiri" pitchFamily="2" charset="-78"/>
                 <a:cs typeface="Amiri" pitchFamily="2" charset="-78"/>
               </a:rPr>
               <a:t>صِفِي الكُلِّيَّةَ الجَدِيدَةَ.</a:t>
@@ -24553,6 +24694,7 @@
                   <a:srgbClr val="1B3B6F"/>
                 </a:solidFill>
                 <a:latin typeface="Amiri" pitchFamily="2" charset="-78"/>
+                <a:ea typeface="Amiri" pitchFamily="2" charset="-78"/>
                 <a:cs typeface="Amiri" pitchFamily="2" charset="-78"/>
               </a:rPr>
               <a:t>مَا المَوَادُّ الَّتِي تَدْرُسِينَهَا؟ وَمَا مَادَّتُكِ المُفَضَّلَةُ؟</a:t>
@@ -24694,6 +24836,7 @@
                   <a:srgbClr val="1B3B6F"/>
                 </a:solidFill>
                 <a:latin typeface="Amiri" pitchFamily="2" charset="-78"/>
+                <a:ea typeface="Amiri" pitchFamily="2" charset="-78"/>
                 <a:cs typeface="Amiri" pitchFamily="2" charset="-78"/>
               </a:rPr>
               <a:t>مَاذَا تَفْعَلِينَ أَيْضًا هٰذِهِ السَّنَةَ؟ وَمَا رَأْيُكِ؟</a:t>
@@ -24835,6 +24978,7 @@
                   <a:srgbClr val="1B3B6F"/>
                 </a:solidFill>
                 <a:latin typeface="Amiri" pitchFamily="2" charset="-78"/>
+                <a:ea typeface="Amiri" pitchFamily="2" charset="-78"/>
                 <a:cs typeface="Amiri" pitchFamily="2" charset="-78"/>
               </a:rPr>
               <a:t>مَا خِطَطُكِ لِلْمُسْتَقْبَلِ؟ وَاسْأَلِي صَدِيقَتَكِ سُؤَالًا.</a:t>
@@ -25044,6 +25188,7 @@
                   <a:srgbClr val="D4AF37"/>
                 </a:solidFill>
                 <a:latin typeface="Amiri" pitchFamily="2" charset="-78"/>
+                <a:ea typeface="Amiri" pitchFamily="2" charset="-78"/>
                 <a:cs typeface="Amiri" pitchFamily="2" charset="-78"/>
               </a:rPr>
               <a:t>م</a:t>
@@ -25364,6 +25509,7 @@
                   <a:srgbClr val="8A6D1E"/>
                 </a:solidFill>
                 <a:latin typeface="Amiri" pitchFamily="2" charset="-78"/>
+                <a:ea typeface="Amiri" pitchFamily="2" charset="-78"/>
                 <a:cs typeface="Amiri" pitchFamily="2" charset="-78"/>
               </a:rPr>
               <a:t>قَوَالِبُ الكِتَابَةِ</a:t>
@@ -25644,6 +25790,7 @@
                   <a:srgbClr val="1B3B6F"/>
                 </a:solidFill>
                 <a:latin typeface="Amiri" pitchFamily="2" charset="-78"/>
+                <a:ea typeface="Amiri" pitchFamily="2" charset="-78"/>
                 <a:cs typeface="Amiri" pitchFamily="2" charset="-78"/>
               </a:rPr>
               <a:t>مَرْحَبًا يَا ______ ، كَيْفَ حَالُكِ؟</a:t>
@@ -25850,6 +25997,7 @@
                   <a:srgbClr val="1B3B6F"/>
                 </a:solidFill>
                 <a:latin typeface="Amiri" pitchFamily="2" charset="-78"/>
+                <a:ea typeface="Amiri" pitchFamily="2" charset="-78"/>
                 <a:cs typeface="Amiri" pitchFamily="2" charset="-78"/>
               </a:rPr>
               <a:t>الكُلِّيَّةُ ______ وَ______ ، وَفِيهَا ______ .</a:t>
@@ -26056,6 +26204,7 @@
                   <a:srgbClr val="1B3B6F"/>
                 </a:solidFill>
                 <a:latin typeface="Amiri" pitchFamily="2" charset="-78"/>
+                <a:ea typeface="Amiri" pitchFamily="2" charset="-78"/>
                 <a:cs typeface="Amiri" pitchFamily="2" charset="-78"/>
               </a:rPr>
               <a:t>أَدْرُسُ ______ . مَادَّتِي المُفَضَّلَةُ ______ ، لِأَنَّ ______ .</a:t>
@@ -26262,6 +26411,7 @@
                   <a:srgbClr val="1B3B6F"/>
                 </a:solidFill>
                 <a:latin typeface="Amiri" pitchFamily="2" charset="-78"/>
+                <a:ea typeface="Amiri" pitchFamily="2" charset="-78"/>
                 <a:cs typeface="Amiri" pitchFamily="2" charset="-78"/>
               </a:rPr>
               <a:t>بِالإِضَافَةِ إِلَى ذٰلِكَ، بَدَأْتُ ______ ، وَمَعَ ذٰلِكَ ______ .</a:t>
@@ -26468,6 +26618,7 @@
                   <a:srgbClr val="1B3B6F"/>
                 </a:solidFill>
                 <a:latin typeface="Amiri" pitchFamily="2" charset="-78"/>
+                <a:ea typeface="Amiri" pitchFamily="2" charset="-78"/>
                 <a:cs typeface="Amiri" pitchFamily="2" charset="-78"/>
               </a:rPr>
               <a:t>فِي المُسْتَقْبَلِ سَأَ______ . وَأَنْتِ، ______ ؟</a:t>
@@ -26674,6 +26825,7 @@
                   <a:srgbClr val="1B3B6F"/>
                 </a:solidFill>
                 <a:latin typeface="Amiri" pitchFamily="2" charset="-78"/>
+                <a:ea typeface="Amiri" pitchFamily="2" charset="-78"/>
                 <a:cs typeface="Amiri" pitchFamily="2" charset="-78"/>
               </a:rPr>
               <a:t>مَعَ السَّلَامَةِ، ______</a:t>
@@ -26913,13 +27065,9 @@
     <a:fontScheme name="Office">
       <a:majorFont>
         <a:latin typeface="Calibri Light" panose="020F0302020204030204"/>
-        <a:ea typeface=""/>
-        <a:cs typeface=""/>
-        <a:font script="Jpan" typeface="游ゴシック Light"/>
-        <a:font script="Hang" typeface="맑은 고딕"/>
-        <a:font script="Hans" typeface="等线 Light"/>
-        <a:font script="Hant" typeface="新細明體"/>
-        <a:font script="Arab" typeface="Times New Roman"/>
+        <a:ea typeface="Amiri" pitchFamily="2" charset="-78"/>
+        <a:cs typeface="Amiri" pitchFamily="2" charset="-78"/>
+        <a:font script="Arab" typeface="Amiri"/>
         <a:font script="Hebr" typeface="Times New Roman"/>
         <a:font script="Thai" typeface="Angsana New"/>
         <a:font script="Ethi" typeface="Nyala"/>
@@ -26965,13 +27113,9 @@
       </a:majorFont>
       <a:minorFont>
         <a:latin typeface="Calibri" panose="020F0502020204030204"/>
-        <a:ea typeface=""/>
-        <a:cs typeface=""/>
-        <a:font script="Jpan" typeface="游ゴシック"/>
-        <a:font script="Hang" typeface="맑은 고딕"/>
-        <a:font script="Hans" typeface="等线"/>
-        <a:font script="Hant" typeface="新細明體"/>
-        <a:font script="Arab" typeface="Arial"/>
+        <a:ea typeface="Amiri" pitchFamily="2" charset="-78"/>
+        <a:cs typeface="Amiri" pitchFamily="2" charset="-78"/>
+        <a:font script="Arab" typeface="Amiri"/>
         <a:font script="Hebr" typeface="Arial"/>
         <a:font script="Thai" typeface="Cordia New"/>
         <a:font script="Ethi" typeface="Nyala"/>

--- a/Topic_D/Exam_Practice/TD-L12_Writing_Workshop_Topic_D_Review_and_Four_Skills_Assessment.pptx
+++ b/Topic_D/Exam_Practice/TD-L12_Writing_Workshop_Topic_D_Review_and_Four_Skills_Assessment.pptx
@@ -3848,7 +3848,7 @@
                 <a:solidFill>
                   <a:srgbClr val="FFFFFF"/>
                 </a:solidFill>
-                <a:latin typeface="Calibri" pitchFamily="34" charset="0"/>
+                <a:latin typeface="Amiri" pitchFamily="2" charset="-78"/>
                 <a:ea typeface="Amiri" pitchFamily="2" charset="-78"/>
                 <a:cs typeface="Amiri" pitchFamily="2" charset="-78"/>
               </a:rPr>
@@ -3914,7 +3914,7 @@
                 <a:solidFill>
                   <a:srgbClr val="FFFFFF"/>
                 </a:solidFill>
-                <a:latin typeface="Calibri" pitchFamily="34" charset="0"/>
+                <a:latin typeface="Amiri" pitchFamily="2" charset="-78"/>
                 <a:ea typeface="Amiri" pitchFamily="2" charset="-78"/>
                 <a:cs typeface="Amiri" pitchFamily="2" charset="-78"/>
               </a:rPr>
@@ -3980,7 +3980,7 @@
                 <a:solidFill>
                   <a:srgbClr val="FFFFFF"/>
                 </a:solidFill>
-                <a:latin typeface="Calibri" pitchFamily="34" charset="0"/>
+                <a:latin typeface="Amiri" pitchFamily="2" charset="-78"/>
                 <a:ea typeface="Amiri" pitchFamily="2" charset="-78"/>
                 <a:cs typeface="Amiri" pitchFamily="2" charset="-78"/>
               </a:rPr>
@@ -4046,7 +4046,7 @@
                 <a:solidFill>
                   <a:srgbClr val="FFFFFF"/>
                 </a:solidFill>
-                <a:latin typeface="Calibri" pitchFamily="34" charset="0"/>
+                <a:latin typeface="Amiri" pitchFamily="2" charset="-78"/>
                 <a:ea typeface="Amiri" pitchFamily="2" charset="-78"/>
                 <a:cs typeface="Amiri" pitchFamily="2" charset="-78"/>
               </a:rPr>
@@ -4844,7 +4844,7 @@
                 <a:solidFill>
                   <a:srgbClr val="FFFFFF"/>
                 </a:solidFill>
-                <a:latin typeface="Calibri" pitchFamily="34" charset="0"/>
+                <a:latin typeface="Amiri" pitchFamily="2" charset="-78"/>
                 <a:ea typeface="Amiri" pitchFamily="2" charset="-78"/>
                 <a:cs typeface="Amiri" pitchFamily="2" charset="-78"/>
               </a:rPr>
@@ -4910,7 +4910,7 @@
                 <a:solidFill>
                   <a:srgbClr val="FFFFFF"/>
                 </a:solidFill>
-                <a:latin typeface="Calibri" pitchFamily="34" charset="0"/>
+                <a:latin typeface="Amiri" pitchFamily="2" charset="-78"/>
                 <a:ea typeface="Amiri" pitchFamily="2" charset="-78"/>
                 <a:cs typeface="Amiri" pitchFamily="2" charset="-78"/>
               </a:rPr>
@@ -4976,7 +4976,7 @@
                 <a:solidFill>
                   <a:srgbClr val="FFFFFF"/>
                 </a:solidFill>
-                <a:latin typeface="Calibri" pitchFamily="34" charset="0"/>
+                <a:latin typeface="Amiri" pitchFamily="2" charset="-78"/>
                 <a:ea typeface="Amiri" pitchFamily="2" charset="-78"/>
                 <a:cs typeface="Amiri" pitchFamily="2" charset="-78"/>
               </a:rPr>
@@ -5042,7 +5042,7 @@
                 <a:solidFill>
                   <a:srgbClr val="FFFFFF"/>
                 </a:solidFill>
-                <a:latin typeface="Calibri" pitchFamily="34" charset="0"/>
+                <a:latin typeface="Amiri" pitchFamily="2" charset="-78"/>
                 <a:ea typeface="Amiri" pitchFamily="2" charset="-78"/>
                 <a:cs typeface="Amiri" pitchFamily="2" charset="-78"/>
               </a:rPr>
@@ -8599,7 +8599,7 @@
                 <a:solidFill>
                   <a:srgbClr val="FFFFFF"/>
                 </a:solidFill>
-                <a:latin typeface="Calibri" pitchFamily="34" charset="0"/>
+                <a:latin typeface="Amiri" pitchFamily="2" charset="-78"/>
                 <a:ea typeface="Amiri" pitchFamily="2" charset="-78"/>
                 <a:cs typeface="Amiri" pitchFamily="2" charset="-78"/>
               </a:rPr>
@@ -8665,7 +8665,7 @@
                 <a:solidFill>
                   <a:srgbClr val="FFFFFF"/>
                 </a:solidFill>
-                <a:latin typeface="Calibri" pitchFamily="34" charset="0"/>
+                <a:latin typeface="Amiri" pitchFamily="2" charset="-78"/>
                 <a:ea typeface="Amiri" pitchFamily="2" charset="-78"/>
                 <a:cs typeface="Amiri" pitchFamily="2" charset="-78"/>
               </a:rPr>
@@ -8731,7 +8731,7 @@
                 <a:solidFill>
                   <a:srgbClr val="FFFFFF"/>
                 </a:solidFill>
-                <a:latin typeface="Calibri" pitchFamily="34" charset="0"/>
+                <a:latin typeface="Amiri" pitchFamily="2" charset="-78"/>
                 <a:ea typeface="Amiri" pitchFamily="2" charset="-78"/>
                 <a:cs typeface="Amiri" pitchFamily="2" charset="-78"/>
               </a:rPr>
@@ -8797,7 +8797,7 @@
                 <a:solidFill>
                   <a:srgbClr val="FFFFFF"/>
                 </a:solidFill>
-                <a:latin typeface="Calibri" pitchFamily="34" charset="0"/>
+                <a:latin typeface="Amiri" pitchFamily="2" charset="-78"/>
                 <a:ea typeface="Amiri" pitchFamily="2" charset="-78"/>
                 <a:cs typeface="Amiri" pitchFamily="2" charset="-78"/>
               </a:rPr>
@@ -9584,7 +9584,7 @@
                 <a:solidFill>
                   <a:srgbClr val="FFFFFF"/>
                 </a:solidFill>
-                <a:latin typeface="Calibri" pitchFamily="34" charset="0"/>
+                <a:latin typeface="Amiri" pitchFamily="2" charset="-78"/>
                 <a:ea typeface="Amiri" pitchFamily="2" charset="-78"/>
                 <a:cs typeface="Amiri" pitchFamily="2" charset="-78"/>
               </a:rPr>
@@ -9650,7 +9650,7 @@
                 <a:solidFill>
                   <a:srgbClr val="FFFFFF"/>
                 </a:solidFill>
-                <a:latin typeface="Calibri" pitchFamily="34" charset="0"/>
+                <a:latin typeface="Amiri" pitchFamily="2" charset="-78"/>
                 <a:ea typeface="Amiri" pitchFamily="2" charset="-78"/>
                 <a:cs typeface="Amiri" pitchFamily="2" charset="-78"/>
               </a:rPr>
@@ -9716,7 +9716,7 @@
                 <a:solidFill>
                   <a:srgbClr val="FFFFFF"/>
                 </a:solidFill>
-                <a:latin typeface="Calibri" pitchFamily="34" charset="0"/>
+                <a:latin typeface="Amiri" pitchFamily="2" charset="-78"/>
                 <a:ea typeface="Amiri" pitchFamily="2" charset="-78"/>
                 <a:cs typeface="Amiri" pitchFamily="2" charset="-78"/>
               </a:rPr>
@@ -9782,7 +9782,7 @@
                 <a:solidFill>
                   <a:srgbClr val="FFFFFF"/>
                 </a:solidFill>
-                <a:latin typeface="Calibri" pitchFamily="34" charset="0"/>
+                <a:latin typeface="Amiri" pitchFamily="2" charset="-78"/>
                 <a:ea typeface="Amiri" pitchFamily="2" charset="-78"/>
                 <a:cs typeface="Amiri" pitchFamily="2" charset="-78"/>
               </a:rPr>
@@ -10569,7 +10569,7 @@
                 <a:solidFill>
                   <a:srgbClr val="FFFFFF"/>
                 </a:solidFill>
-                <a:latin typeface="Calibri" pitchFamily="34" charset="0"/>
+                <a:latin typeface="Amiri" pitchFamily="2" charset="-78"/>
                 <a:ea typeface="Amiri" pitchFamily="2" charset="-78"/>
                 <a:cs typeface="Amiri" pitchFamily="2" charset="-78"/>
               </a:rPr>
@@ -10635,7 +10635,7 @@
                 <a:solidFill>
                   <a:srgbClr val="FFFFFF"/>
                 </a:solidFill>
-                <a:latin typeface="Calibri" pitchFamily="34" charset="0"/>
+                <a:latin typeface="Amiri" pitchFamily="2" charset="-78"/>
                 <a:ea typeface="Amiri" pitchFamily="2" charset="-78"/>
                 <a:cs typeface="Amiri" pitchFamily="2" charset="-78"/>
               </a:rPr>
@@ -10701,7 +10701,7 @@
                 <a:solidFill>
                   <a:srgbClr val="FFFFFF"/>
                 </a:solidFill>
-                <a:latin typeface="Calibri" pitchFamily="34" charset="0"/>
+                <a:latin typeface="Amiri" pitchFamily="2" charset="-78"/>
                 <a:ea typeface="Amiri" pitchFamily="2" charset="-78"/>
                 <a:cs typeface="Amiri" pitchFamily="2" charset="-78"/>
               </a:rPr>
@@ -10767,7 +10767,7 @@
                 <a:solidFill>
                   <a:srgbClr val="FFFFFF"/>
                 </a:solidFill>
-                <a:latin typeface="Calibri" pitchFamily="34" charset="0"/>
+                <a:latin typeface="Amiri" pitchFamily="2" charset="-78"/>
                 <a:ea typeface="Amiri" pitchFamily="2" charset="-78"/>
                 <a:cs typeface="Amiri" pitchFamily="2" charset="-78"/>
               </a:rPr>
